--- a/HPC_MC1.pptx
+++ b/HPC_MC1.pptx
@@ -125,6 +125,144 @@
 </p:presentation>
 </file>
 
+<file path=ppt/revisionInfo.xml><?xml version="1.0" encoding="utf-8"?>
+<p1510:revInfo xmlns:a="http://schemas.openxmlformats.org/drawingml/2006/main" xmlns:r="http://schemas.openxmlformats.org/officeDocument/2006/relationships" xmlns:p1510="http://schemas.microsoft.com/office/powerpoint/2015/10/main">
+  <p1510:revLst>
+    <p1510:client id="{6B0A2070-5A3A-4F73-82D5-B0A4C0142983}" v="3" dt="2026-04-21T11:01:09.550"/>
+  </p1510:revLst>
+</p1510:revInfo>
+</file>
+
+<file path=ppt/changesInfos/changesInfo1.xml><?xml version="1.0" encoding="utf-8"?>
+<pc:chgInfo xmlns:a="http://schemas.openxmlformats.org/drawingml/2006/main" xmlns:r="http://schemas.openxmlformats.org/officeDocument/2006/relationships" xmlns:ac="http://schemas.microsoft.com/office/drawing/2013/main/command" xmlns:pc="http://schemas.microsoft.com/office/powerpoint/2013/main/command">
+  <pc:docChgLst>
+    <pc:chgData name="Shwetav Behera" userId="972837c5e7c14fc4" providerId="LiveId" clId="{356DE455-539E-4C4A-A44E-D735BD7F8C17}"/>
+    <pc:docChg chg="custSel modSld sldOrd">
+      <pc:chgData name="Shwetav Behera" userId="972837c5e7c14fc4" providerId="LiveId" clId="{356DE455-539E-4C4A-A44E-D735BD7F8C17}" dt="2026-04-21T11:02:52.863" v="249" actId="20577"/>
+      <pc:docMkLst>
+        <pc:docMk/>
+      </pc:docMkLst>
+      <pc:sldChg chg="modSp mod">
+        <pc:chgData name="Shwetav Behera" userId="972837c5e7c14fc4" providerId="LiveId" clId="{356DE455-539E-4C4A-A44E-D735BD7F8C17}" dt="2026-04-21T11:02:52.863" v="249" actId="20577"/>
+        <pc:sldMkLst>
+          <pc:docMk/>
+          <pc:sldMk cId="3650834177" sldId="256"/>
+        </pc:sldMkLst>
+        <pc:spChg chg="mod">
+          <ac:chgData name="Shwetav Behera" userId="972837c5e7c14fc4" providerId="LiveId" clId="{356DE455-539E-4C4A-A44E-D735BD7F8C17}" dt="2026-04-21T11:02:52.863" v="249" actId="20577"/>
+          <ac:spMkLst>
+            <pc:docMk/>
+            <pc:sldMk cId="3650834177" sldId="256"/>
+            <ac:spMk id="3" creationId="{4AF6A5E0-B0C0-17BD-2F9F-CB76BE2A2110}"/>
+          </ac:spMkLst>
+        </pc:spChg>
+      </pc:sldChg>
+      <pc:sldChg chg="modSp mod">
+        <pc:chgData name="Shwetav Behera" userId="972837c5e7c14fc4" providerId="LiveId" clId="{356DE455-539E-4C4A-A44E-D735BD7F8C17}" dt="2026-04-21T10:55:24.762" v="0" actId="1076"/>
+        <pc:sldMkLst>
+          <pc:docMk/>
+          <pc:sldMk cId="1820305367" sldId="269"/>
+        </pc:sldMkLst>
+        <pc:spChg chg="mod">
+          <ac:chgData name="Shwetav Behera" userId="972837c5e7c14fc4" providerId="LiveId" clId="{356DE455-539E-4C4A-A44E-D735BD7F8C17}" dt="2026-04-21T10:55:24.762" v="0" actId="1076"/>
+          <ac:spMkLst>
+            <pc:docMk/>
+            <pc:sldMk cId="1820305367" sldId="269"/>
+            <ac:spMk id="5" creationId="{9CFB7AAB-677A-BDD4-AD2F-AFC095ACAF37}"/>
+          </ac:spMkLst>
+        </pc:spChg>
+      </pc:sldChg>
+      <pc:sldChg chg="addSp delSp modSp mod ord">
+        <pc:chgData name="Shwetav Behera" userId="972837c5e7c14fc4" providerId="LiveId" clId="{356DE455-539E-4C4A-A44E-D735BD7F8C17}" dt="2026-04-21T11:00:37.801" v="145"/>
+        <pc:sldMkLst>
+          <pc:docMk/>
+          <pc:sldMk cId="465637521" sldId="270"/>
+        </pc:sldMkLst>
+        <pc:spChg chg="mod">
+          <ac:chgData name="Shwetav Behera" userId="972837c5e7c14fc4" providerId="LiveId" clId="{356DE455-539E-4C4A-A44E-D735BD7F8C17}" dt="2026-04-21T10:57:04.289" v="19" actId="20577"/>
+          <ac:spMkLst>
+            <pc:docMk/>
+            <pc:sldMk cId="465637521" sldId="270"/>
+            <ac:spMk id="2" creationId="{04AFBCE2-1601-579C-5C1D-03E4DAE3DA31}"/>
+          </ac:spMkLst>
+        </pc:spChg>
+        <pc:spChg chg="add del mod">
+          <ac:chgData name="Shwetav Behera" userId="972837c5e7c14fc4" providerId="LiveId" clId="{356DE455-539E-4C4A-A44E-D735BD7F8C17}" dt="2026-04-21T10:56:53.887" v="2" actId="22"/>
+          <ac:spMkLst>
+            <pc:docMk/>
+            <pc:sldMk cId="465637521" sldId="270"/>
+            <ac:spMk id="7" creationId="{E849E864-EB7B-6BAB-9611-AEA60875BA1A}"/>
+          </ac:spMkLst>
+        </pc:spChg>
+        <pc:spChg chg="add mod">
+          <ac:chgData name="Shwetav Behera" userId="972837c5e7c14fc4" providerId="LiveId" clId="{356DE455-539E-4C4A-A44E-D735BD7F8C17}" dt="2026-04-21T10:59:22.836" v="141" actId="1076"/>
+          <ac:spMkLst>
+            <pc:docMk/>
+            <pc:sldMk cId="465637521" sldId="270"/>
+            <ac:spMk id="10" creationId="{E87261AE-2029-C594-3188-6262E59C7E13}"/>
+          </ac:spMkLst>
+        </pc:spChg>
+        <pc:picChg chg="del">
+          <ac:chgData name="Shwetav Behera" userId="972837c5e7c14fc4" providerId="LiveId" clId="{356DE455-539E-4C4A-A44E-D735BD7F8C17}" dt="2026-04-21T10:56:52.373" v="1" actId="478"/>
+          <ac:picMkLst>
+            <pc:docMk/>
+            <pc:sldMk cId="465637521" sldId="270"/>
+            <ac:picMk id="5" creationId="{34DF9767-502D-B697-B2E8-F1D708142697}"/>
+          </ac:picMkLst>
+        </pc:picChg>
+        <pc:picChg chg="add mod ord">
+          <ac:chgData name="Shwetav Behera" userId="972837c5e7c14fc4" providerId="LiveId" clId="{356DE455-539E-4C4A-A44E-D735BD7F8C17}" dt="2026-04-21T10:56:58.174" v="4" actId="1076"/>
+          <ac:picMkLst>
+            <pc:docMk/>
+            <pc:sldMk cId="465637521" sldId="270"/>
+            <ac:picMk id="9" creationId="{B517011D-C928-EBA2-02C7-174209A3B992}"/>
+          </ac:picMkLst>
+        </pc:picChg>
+      </pc:sldChg>
+      <pc:sldChg chg="addSp delSp modSp mod">
+        <pc:chgData name="Shwetav Behera" userId="972837c5e7c14fc4" providerId="LiveId" clId="{356DE455-539E-4C4A-A44E-D735BD7F8C17}" dt="2026-04-21T11:02:17.456" v="235" actId="1076"/>
+        <pc:sldMkLst>
+          <pc:docMk/>
+          <pc:sldMk cId="3183820238" sldId="271"/>
+        </pc:sldMkLst>
+        <pc:spChg chg="add del mod">
+          <ac:chgData name="Shwetav Behera" userId="972837c5e7c14fc4" providerId="LiveId" clId="{356DE455-539E-4C4A-A44E-D735BD7F8C17}" dt="2026-04-21T11:00:52.067" v="147"/>
+          <ac:spMkLst>
+            <pc:docMk/>
+            <pc:sldMk cId="3183820238" sldId="271"/>
+            <ac:spMk id="10" creationId="{2B371265-B1FB-9C1C-9434-6072CA66AFA0}"/>
+          </ac:spMkLst>
+        </pc:spChg>
+        <pc:spChg chg="add mod">
+          <ac:chgData name="Shwetav Behera" userId="972837c5e7c14fc4" providerId="LiveId" clId="{356DE455-539E-4C4A-A44E-D735BD7F8C17}" dt="2026-04-21T11:02:17.456" v="235" actId="1076"/>
+          <ac:spMkLst>
+            <pc:docMk/>
+            <pc:sldMk cId="3183820238" sldId="271"/>
+            <ac:spMk id="12" creationId="{2F1CB019-4D02-99DF-00CC-1A8309EEC128}"/>
+          </ac:spMkLst>
+        </pc:spChg>
+        <pc:picChg chg="del">
+          <ac:chgData name="Shwetav Behera" userId="972837c5e7c14fc4" providerId="LiveId" clId="{356DE455-539E-4C4A-A44E-D735BD7F8C17}" dt="2026-04-21T11:00:50.194" v="146" actId="478"/>
+          <ac:picMkLst>
+            <pc:docMk/>
+            <pc:sldMk cId="3183820238" sldId="271"/>
+            <ac:picMk id="8" creationId="{280A8626-FFFD-4FE7-943E-DD353516C7DA}"/>
+          </ac:picMkLst>
+        </pc:picChg>
+        <pc:picChg chg="add mod">
+          <ac:chgData name="Shwetav Behera" userId="972837c5e7c14fc4" providerId="LiveId" clId="{356DE455-539E-4C4A-A44E-D735BD7F8C17}" dt="2026-04-21T11:00:57.311" v="150" actId="1076"/>
+          <ac:picMkLst>
+            <pc:docMk/>
+            <pc:sldMk cId="3183820238" sldId="271"/>
+            <ac:picMk id="11" creationId="{FEB47401-DA64-AA6A-9421-51C5123B4C25}"/>
+          </ac:picMkLst>
+        </pc:picChg>
+      </pc:sldChg>
+    </pc:docChg>
+  </pc:docChgLst>
+</pc:chgInfo>
+</file>
+
 <file path=ppt/notesMasters/notesMaster1.xml><?xml version="1.0" encoding="utf-8"?>
 <p:notesMaster xmlns:a="http://schemas.openxmlformats.org/drawingml/2006/main" xmlns:r="http://schemas.openxmlformats.org/officeDocument/2006/relationships" xmlns:p="http://schemas.openxmlformats.org/presentationml/2006/main">
   <p:cSld>
@@ -540,7 +678,7 @@
           <a:p>
             <a:fld id="{41CE4A03-BE3D-405F-A11D-E2DC3FE51E68}" type="slidenum">
               <a:rPr lang="en-CH" smtClean="0"/>
-              <a:t>3</a:t>
+              <a:t>1</a:t>
             </a:fld>
             <a:endParaRPr lang="en-CH"/>
           </a:p>
@@ -549,7 +687,7 @@
     </p:spTree>
     <p:extLst>
       <p:ext uri="{BB962C8B-B14F-4D97-AF65-F5344CB8AC3E}">
-        <p14:creationId xmlns:p14="http://schemas.microsoft.com/office/powerpoint/2010/main" val="1816737945"/>
+        <p14:creationId xmlns:p14="http://schemas.microsoft.com/office/powerpoint/2010/main" val="3546486059"/>
       </p:ext>
     </p:extLst>
   </p:cSld>
@@ -624,6 +762,90 @@
           <a:p>
             <a:fld id="{41CE4A03-BE3D-405F-A11D-E2DC3FE51E68}" type="slidenum">
               <a:rPr lang="en-CH" smtClean="0"/>
+              <a:t>3</a:t>
+            </a:fld>
+            <a:endParaRPr lang="en-CH"/>
+          </a:p>
+        </p:txBody>
+      </p:sp>
+    </p:spTree>
+    <p:extLst>
+      <p:ext uri="{BB962C8B-B14F-4D97-AF65-F5344CB8AC3E}">
+        <p14:creationId xmlns:p14="http://schemas.microsoft.com/office/powerpoint/2010/main" val="1816737945"/>
+      </p:ext>
+    </p:extLst>
+  </p:cSld>
+  <p:clrMapOvr>
+    <a:masterClrMapping/>
+  </p:clrMapOvr>
+</p:notes>
+</file>
+
+<file path=ppt/notesSlides/notesSlide3.xml><?xml version="1.0" encoding="utf-8"?>
+<p:notes xmlns:a="http://schemas.openxmlformats.org/drawingml/2006/main" xmlns:r="http://schemas.openxmlformats.org/officeDocument/2006/relationships" xmlns:p="http://schemas.openxmlformats.org/presentationml/2006/main">
+  <p:cSld>
+    <p:spTree>
+      <p:nvGrpSpPr>
+        <p:cNvPr id="1" name=""/>
+        <p:cNvGrpSpPr/>
+        <p:nvPr/>
+      </p:nvGrpSpPr>
+      <p:grpSpPr>
+        <a:xfrm>
+          <a:off x="0" y="0"/>
+          <a:ext cx="0" cy="0"/>
+          <a:chOff x="0" y="0"/>
+          <a:chExt cx="0" cy="0"/>
+        </a:xfrm>
+      </p:grpSpPr>
+      <p:sp>
+        <p:nvSpPr>
+          <p:cNvPr id="2" name="Slide Image Placeholder 1"/>
+          <p:cNvSpPr>
+            <a:spLocks noGrp="1" noRot="1" noChangeAspect="1"/>
+          </p:cNvSpPr>
+          <p:nvPr>
+            <p:ph type="sldImg"/>
+          </p:nvPr>
+        </p:nvSpPr>
+        <p:spPr/>
+      </p:sp>
+      <p:sp>
+        <p:nvSpPr>
+          <p:cNvPr id="3" name="Notes Placeholder 2"/>
+          <p:cNvSpPr>
+            <a:spLocks noGrp="1"/>
+          </p:cNvSpPr>
+          <p:nvPr>
+            <p:ph type="body" idx="1"/>
+          </p:nvPr>
+        </p:nvSpPr>
+        <p:spPr/>
+        <p:txBody>
+          <a:bodyPr/>
+          <a:lstStyle/>
+          <a:p>
+            <a:endParaRPr lang="en-CH" dirty="0"/>
+          </a:p>
+        </p:txBody>
+      </p:sp>
+      <p:sp>
+        <p:nvSpPr>
+          <p:cNvPr id="4" name="Slide Number Placeholder 3"/>
+          <p:cNvSpPr>
+            <a:spLocks noGrp="1"/>
+          </p:cNvSpPr>
+          <p:nvPr>
+            <p:ph type="sldNum" sz="quarter" idx="5"/>
+          </p:nvPr>
+        </p:nvSpPr>
+        <p:spPr/>
+        <p:txBody>
+          <a:bodyPr/>
+          <a:lstStyle/>
+          <a:p>
+            <a:fld id="{41CE4A03-BE3D-405F-A11D-E2DC3FE51E68}" type="slidenum">
+              <a:rPr lang="en-CH" smtClean="0"/>
               <a:t>4</a:t>
             </a:fld>
             <a:endParaRPr lang="en-CH"/>
@@ -643,7 +865,7 @@
 </p:notes>
 </file>
 
-<file path=ppt/notesSlides/notesSlide3.xml><?xml version="1.0" encoding="utf-8"?>
+<file path=ppt/notesSlides/notesSlide4.xml><?xml version="1.0" encoding="utf-8"?>
 <p:notes xmlns:a="http://schemas.openxmlformats.org/drawingml/2006/main" xmlns:r="http://schemas.openxmlformats.org/officeDocument/2006/relationships" xmlns:p="http://schemas.openxmlformats.org/presentationml/2006/main">
   <p:cSld>
     <p:spTree>
@@ -751,7 +973,7 @@
 </p:notes>
 </file>
 
-<file path=ppt/notesSlides/notesSlide4.xml><?xml version="1.0" encoding="utf-8"?>
+<file path=ppt/notesSlides/notesSlide5.xml><?xml version="1.0" encoding="utf-8"?>
 <p:notes xmlns:a="http://schemas.openxmlformats.org/drawingml/2006/main" xmlns:r="http://schemas.openxmlformats.org/officeDocument/2006/relationships" xmlns:p="http://schemas.openxmlformats.org/presentationml/2006/main">
   <p:cSld>
     <p:spTree>
@@ -4534,7 +4756,7 @@
           <p:nvPr/>
         </p:nvPicPr>
         <p:blipFill>
-          <a:blip r:embed="rId2"/>
+          <a:blip r:embed="rId3"/>
           <a:srcRect t="15730"/>
           <a:stretch>
             <a:fillRect/>
@@ -4712,7 +4934,11 @@
           <a:lstStyle/>
           <a:p>
             <a:pPr algn="r"/>
-            <a:endParaRPr lang="en-CH" sz="1900"/>
+            <a:r>
+              <a:rPr lang="en-US" sz="1900" dirty="0"/>
+              <a:t>Shwetav Behera</a:t>
+            </a:r>
+            <a:endParaRPr lang="en-CH" sz="1900" dirty="0"/>
           </a:p>
         </p:txBody>
       </p:sp>
@@ -5237,7 +5463,7 @@
         </p:nvSpPr>
         <p:spPr>
           <a:xfrm>
-            <a:off x="3101340" y="5879592"/>
+            <a:off x="2837815" y="5879592"/>
             <a:ext cx="5989320" cy="369332"/>
           </a:xfrm>
           <a:prstGeom prst="rect">
@@ -5625,10 +5851,10 @@
       </p:sp>
       <p:pic>
         <p:nvPicPr>
-          <p:cNvPr id="5" name="Content Placeholder 4">
-            <a:extLst>
-              <a:ext uri="{FF2B5EF4-FFF2-40B4-BE49-F238E27FC236}">
-                <a16:creationId xmlns:a16="http://schemas.microsoft.com/office/drawing/2014/main" id="{34DF9767-502D-B697-B2E8-F1D708142697}"/>
+          <p:cNvPr id="9" name="Content Placeholder 8">
+            <a:extLst>
+              <a:ext uri="{FF2B5EF4-FFF2-40B4-BE49-F238E27FC236}">
+                <a16:creationId xmlns:a16="http://schemas.microsoft.com/office/drawing/2014/main" id="{B517011D-C928-EBA2-02C7-174209A3B992}"/>
               </a:ext>
             </a:extLst>
           </p:cNvPr>
@@ -5647,14 +5873,70 @@
         </p:blipFill>
         <p:spPr>
           <a:xfrm>
-            <a:off x="2452179" y="2349867"/>
-            <a:ext cx="7287642" cy="1571844"/>
+            <a:off x="234950" y="2573488"/>
+            <a:ext cx="11156950" cy="2442861"/>
           </a:xfrm>
           <a:prstGeom prst="rect">
             <a:avLst/>
           </a:prstGeom>
         </p:spPr>
       </p:pic>
+      <p:sp>
+        <p:nvSpPr>
+          <p:cNvPr id="10" name="TextBox 9">
+            <a:extLst>
+              <a:ext uri="{FF2B5EF4-FFF2-40B4-BE49-F238E27FC236}">
+                <a16:creationId xmlns:a16="http://schemas.microsoft.com/office/drawing/2014/main" id="{E87261AE-2029-C594-3188-6262E59C7E13}"/>
+              </a:ext>
+            </a:extLst>
+          </p:cNvPr>
+          <p:cNvSpPr txBox="1"/>
+          <p:nvPr/>
+        </p:nvSpPr>
+        <p:spPr>
+          <a:xfrm>
+            <a:off x="3341594" y="5205539"/>
+            <a:ext cx="4943661" cy="923330"/>
+          </a:xfrm>
+          <a:prstGeom prst="rect">
+            <a:avLst/>
+          </a:prstGeom>
+          <a:noFill/>
+        </p:spPr>
+        <p:txBody>
+          <a:bodyPr wrap="none" rtlCol="0">
+            <a:spAutoFit/>
+          </a:bodyPr>
+          <a:lstStyle/>
+          <a:p>
+            <a:r>
+              <a:rPr lang="en-US" dirty="0"/>
+              <a:t>-    Producer send to receiving by consumer</a:t>
+            </a:r>
+          </a:p>
+          <a:p>
+            <a:pPr marL="285750" indent="-285750">
+              <a:buFontTx/>
+              <a:buChar char="-"/>
+            </a:pPr>
+            <a:r>
+              <a:rPr lang="en-US" dirty="0"/>
+              <a:t>200 messages</a:t>
+            </a:r>
+          </a:p>
+          <a:p>
+            <a:pPr marL="285750" indent="-285750">
+              <a:buFontTx/>
+              <a:buChar char="-"/>
+            </a:pPr>
+            <a:r>
+              <a:rPr lang="en-US" dirty="0"/>
+              <a:t>RabbitMQ synchronous, Kafka asynchronous</a:t>
+            </a:r>
+            <a:endParaRPr lang="en-CH" dirty="0"/>
+          </a:p>
+        </p:txBody>
+      </p:sp>
     </p:spTree>
     <p:extLst>
       <p:ext uri="{BB962C8B-B14F-4D97-AF65-F5344CB8AC3E}">
@@ -5725,10 +6007,10 @@
       </p:sp>
       <p:pic>
         <p:nvPicPr>
-          <p:cNvPr id="8" name="Content Placeholder 7">
-            <a:extLst>
-              <a:ext uri="{FF2B5EF4-FFF2-40B4-BE49-F238E27FC236}">
-                <a16:creationId xmlns:a16="http://schemas.microsoft.com/office/drawing/2014/main" id="{280A8626-FFFD-4FE7-943E-DD353516C7DA}"/>
+          <p:cNvPr id="11" name="Content Placeholder 10">
+            <a:extLst>
+              <a:ext uri="{FF2B5EF4-FFF2-40B4-BE49-F238E27FC236}">
+                <a16:creationId xmlns:a16="http://schemas.microsoft.com/office/drawing/2014/main" id="{FEB47401-DA64-AA6A-9421-51C5123B4C25}"/>
               </a:ext>
             </a:extLst>
           </p:cNvPr>
@@ -5747,14 +6029,85 @@
         </p:blipFill>
         <p:spPr>
           <a:xfrm>
-            <a:off x="1276976" y="2112454"/>
-            <a:ext cx="5041917" cy="3767138"/>
+            <a:off x="1149114" y="2280256"/>
+            <a:ext cx="4048648" cy="3225194"/>
           </a:xfrm>
           <a:prstGeom prst="rect">
             <a:avLst/>
           </a:prstGeom>
         </p:spPr>
       </p:pic>
+      <p:sp>
+        <p:nvSpPr>
+          <p:cNvPr id="12" name="TextBox 11">
+            <a:extLst>
+              <a:ext uri="{FF2B5EF4-FFF2-40B4-BE49-F238E27FC236}">
+                <a16:creationId xmlns:a16="http://schemas.microsoft.com/office/drawing/2014/main" id="{2F1CB019-4D02-99DF-00CC-1A8309EEC128}"/>
+              </a:ext>
+            </a:extLst>
+          </p:cNvPr>
+          <p:cNvSpPr txBox="1"/>
+          <p:nvPr/>
+        </p:nvSpPr>
+        <p:spPr>
+          <a:xfrm>
+            <a:off x="7861300" y="3015690"/>
+            <a:ext cx="2381250" cy="1754326"/>
+          </a:xfrm>
+          <a:prstGeom prst="rect">
+            <a:avLst/>
+          </a:prstGeom>
+          <a:noFill/>
+        </p:spPr>
+        <p:txBody>
+          <a:bodyPr wrap="square" rtlCol="0">
+            <a:spAutoFit/>
+          </a:bodyPr>
+          <a:lstStyle/>
+          <a:p>
+            <a:r>
+              <a:rPr lang="en-US" dirty="0"/>
+              <a:t>RabbitMQ stable</a:t>
+            </a:r>
+          </a:p>
+          <a:p>
+            <a:pPr marL="285750" indent="-285750">
+              <a:buFont typeface="Wingdings" panose="05000000000000000000" pitchFamily="2" charset="2"/>
+              <a:buChar char="è"/>
+            </a:pPr>
+            <a:r>
+              <a:rPr lang="en-US" dirty="0"/>
+              <a:t>Synchronous</a:t>
+            </a:r>
+          </a:p>
+          <a:p>
+            <a:pPr marL="285750" indent="-285750">
+              <a:buFont typeface="Wingdings" panose="05000000000000000000" pitchFamily="2" charset="2"/>
+              <a:buChar char="è"/>
+            </a:pPr>
+            <a:endParaRPr lang="en-US" dirty="0"/>
+          </a:p>
+          <a:p>
+            <a:r>
+              <a:rPr lang="en-US" dirty="0"/>
+              <a:t>Kafka instable</a:t>
+            </a:r>
+          </a:p>
+          <a:p>
+            <a:pPr marL="285750" indent="-285750">
+              <a:buFont typeface="Wingdings" panose="05000000000000000000" pitchFamily="2" charset="2"/>
+              <a:buChar char="è"/>
+            </a:pPr>
+            <a:r>
+              <a:rPr lang="en-US" dirty="0"/>
+              <a:t>Asynchronous</a:t>
+            </a:r>
+          </a:p>
+          <a:p>
+            <a:endParaRPr lang="en-CH" dirty="0"/>
+          </a:p>
+        </p:txBody>
+      </p:sp>
     </p:spTree>
     <p:extLst>
       <p:ext uri="{BB962C8B-B14F-4D97-AF65-F5344CB8AC3E}">
